--- a/ppt-build/LogPilot-项目介绍.pptx
+++ b/ppt-build/LogPilot-项目介绍.pptx
@@ -3691,7 +3691,7 @@
                 <a:ea typeface="Microsoft YaHei" pitchFamily="34" charset="-122"/>
                 <a:cs typeface="Microsoft YaHei" pitchFamily="34" charset="-120"/>
               </a:rPr>
-              <a:t>全部 6 个 JOB 已完成，自动化验证 105 项全部通过</a:t>
+              <a:t>全链路功能已完整交付，自动化验证 105 项全部通过</a:t>
             </a:r>
             <a:endParaRPr lang="en-US" sz="1300" dirty="0"/>
           </a:p>
@@ -4404,7 +4404,7 @@
                 <a:ea typeface="Microsoft YaHei" pitchFamily="34" charset="-122"/>
                 <a:cs typeface="Microsoft YaHei" pitchFamily="34" charset="-120"/>
               </a:rPr>
-              <a:t>JOB-000</a:t>
+              <a:t>环境与</a:t>
             </a:r>
             <a:endParaRPr lang="en-US" sz="900" dirty="0"/>
           </a:p>
@@ -4421,7 +4421,7 @@
                 <a:ea typeface="Microsoft YaHei" pitchFamily="34" charset="-122"/>
                 <a:cs typeface="Microsoft YaHei" pitchFamily="34" charset="-120"/>
               </a:rPr>
-              <a:t>环境与骨架</a:t>
+              <a:t>工程骨架</a:t>
             </a:r>
             <a:endParaRPr lang="en-US" sz="900" dirty="0"/>
           </a:p>
@@ -4524,7 +4524,7 @@
                 <a:ea typeface="Microsoft YaHei" pitchFamily="34" charset="-122"/>
                 <a:cs typeface="Microsoft YaHei" pitchFamily="34" charset="-120"/>
               </a:rPr>
-              <a:t>JOB-001</a:t>
+              <a:t>日志解析</a:t>
             </a:r>
             <a:endParaRPr lang="en-US" sz="900" dirty="0"/>
           </a:p>
@@ -4541,7 +4541,7 @@
                 <a:ea typeface="Microsoft YaHei" pitchFamily="34" charset="-122"/>
                 <a:cs typeface="Microsoft YaHei" pitchFamily="34" charset="-120"/>
               </a:rPr>
-              <a:t>解析+时间窗口</a:t>
+              <a:t>时间窗口</a:t>
             </a:r>
             <a:endParaRPr lang="en-US" sz="900" dirty="0"/>
           </a:p>
@@ -4644,7 +4644,7 @@
                 <a:ea typeface="Microsoft YaHei" pitchFamily="34" charset="-122"/>
                 <a:cs typeface="Microsoft YaHei" pitchFamily="34" charset="-120"/>
               </a:rPr>
-              <a:t>JOB-002</a:t>
+              <a:t>PID</a:t>
             </a:r>
             <a:endParaRPr lang="en-US" sz="900" dirty="0"/>
           </a:p>
@@ -4661,7 +4661,7 @@
                 <a:ea typeface="Microsoft YaHei" pitchFamily="34" charset="-122"/>
                 <a:cs typeface="Microsoft YaHei" pitchFamily="34" charset="-120"/>
               </a:rPr>
-              <a:t>PID 生命周期</a:t>
+              <a:t>生命周期</a:t>
             </a:r>
             <a:endParaRPr lang="en-US" sz="900" dirty="0"/>
           </a:p>
@@ -4764,7 +4764,7 @@
                 <a:ea typeface="Microsoft YaHei" pitchFamily="34" charset="-122"/>
                 <a:cs typeface="Microsoft YaHei" pitchFamily="34" charset="-120"/>
               </a:rPr>
-              <a:t>JOB-003</a:t>
+              <a:t>动态 Tag</a:t>
             </a:r>
             <a:endParaRPr lang="en-US" sz="900" dirty="0"/>
           </a:p>
@@ -4781,7 +4781,7 @@
                 <a:ea typeface="Microsoft YaHei" pitchFamily="34" charset="-122"/>
                 <a:cs typeface="Microsoft YaHei" pitchFamily="34" charset="-120"/>
               </a:rPr>
-              <a:t>Tag+时间线</a:t>
+              <a:t>事件时间线</a:t>
             </a:r>
             <a:endParaRPr lang="en-US" sz="900" dirty="0"/>
           </a:p>
@@ -4884,7 +4884,7 @@
                 <a:ea typeface="Microsoft YaHei" pitchFamily="34" charset="-122"/>
                 <a:cs typeface="Microsoft YaHei" pitchFamily="34" charset="-120"/>
               </a:rPr>
-              <a:t>JOB-004</a:t>
+              <a:t>AI</a:t>
             </a:r>
             <a:endParaRPr lang="en-US" sz="900" dirty="0"/>
           </a:p>
@@ -4901,7 +4901,7 @@
                 <a:ea typeface="Microsoft YaHei" pitchFamily="34" charset="-122"/>
                 <a:cs typeface="Microsoft YaHei" pitchFamily="34" charset="-120"/>
               </a:rPr>
-              <a:t>AI 分诊报告</a:t>
+              <a:t>分诊报告</a:t>
             </a:r>
             <a:endParaRPr lang="en-US" sz="900" dirty="0"/>
           </a:p>
@@ -5004,7 +5004,7 @@
                 <a:ea typeface="Microsoft YaHei" pitchFamily="34" charset="-122"/>
                 <a:cs typeface="Microsoft YaHei" pitchFamily="34" charset="-120"/>
               </a:rPr>
-              <a:t>JOB-005</a:t>
+              <a:t>HM/Jira</a:t>
             </a:r>
             <a:endParaRPr lang="en-US" sz="900" dirty="0"/>
           </a:p>
@@ -5021,7 +5021,7 @@
                 <a:ea typeface="Microsoft YaHei" pitchFamily="34" charset="-122"/>
                 <a:cs typeface="Microsoft YaHei" pitchFamily="34" charset="-120"/>
               </a:rPr>
-              <a:t>HM/Jira 闭环</a:t>
+              <a:t>闭环 Demo</a:t>
             </a:r>
             <a:endParaRPr lang="en-US" sz="900" dirty="0"/>
           </a:p>
@@ -5124,7 +5124,7 @@
                 <a:ea typeface="Microsoft YaHei" pitchFamily="34" charset="-122"/>
                 <a:cs typeface="Microsoft YaHei" pitchFamily="34" charset="-120"/>
               </a:rPr>
-              <a:t>JOB-006</a:t>
+              <a:t>集成验收</a:t>
             </a:r>
             <a:endParaRPr lang="en-US" sz="900" dirty="0"/>
           </a:p>
@@ -5141,7 +5141,7 @@
                 <a:ea typeface="Microsoft YaHei" pitchFamily="34" charset="-122"/>
                 <a:cs typeface="Microsoft YaHei" pitchFamily="34" charset="-120"/>
               </a:rPr>
-              <a:t>终审</a:t>
+              <a:t>端到端</a:t>
             </a:r>
             <a:endParaRPr lang="en-US" sz="900" dirty="0"/>
           </a:p>

--- a/ppt-build/LogPilot-项目介绍.pptx
+++ b/ppt-build/LogPilot-项目介绍.pptx
@@ -16742,7 +16742,7 @@
                 <a:ea typeface="Microsoft YaHei" pitchFamily="34" charset="-122"/>
                 <a:cs typeface="Microsoft YaHei" pitchFamily="34" charset="-120"/>
               </a:rPr>
-              <a:t>R3</a:t>
+              <a:t>01</a:t>
             </a:r>
             <a:endParaRPr lang="en-US" sz="2800" dirty="0"/>
           </a:p>
@@ -16965,7 +16965,7 @@
                 <a:ea typeface="Microsoft YaHei" pitchFamily="34" charset="-122"/>
                 <a:cs typeface="Microsoft YaHei" pitchFamily="34" charset="-120"/>
               </a:rPr>
-              <a:t>R6</a:t>
+              <a:t>02</a:t>
             </a:r>
             <a:endParaRPr lang="en-US" sz="2800" dirty="0"/>
           </a:p>
@@ -17188,7 +17188,7 @@
                 <a:ea typeface="Microsoft YaHei" pitchFamily="34" charset="-122"/>
                 <a:cs typeface="Microsoft YaHei" pitchFamily="34" charset="-120"/>
               </a:rPr>
-              <a:t>R7</a:t>
+              <a:t>03</a:t>
             </a:r>
             <a:endParaRPr lang="en-US" sz="2800" dirty="0"/>
           </a:p>
